--- a/task168/golden/summer2025_turnaways.pptx
+++ b/task168/golden/summer2025_turnaways.pptx
@@ -3525,7 +3525,7 @@
               </a:defRPr>
             </a:pPr>
             <a:r>
-              <a:t>Source: booking engines' refusals log (website, app, contact centre, agency feed), requests logged at or after the departure sold out (RM sell-out time). Network Planning, 12/12/2025.</a:t>
+              <a:t>Source: booking engines' refusals log (website, app, contact centre, agency feed), requests logged at or after the departure sold out (RM sell-out time), each session, call or booking reference once per departure. Network Planning, 12/12/2025.</a:t>
             </a:r>
           </a:p>
         </p:txBody>
